--- a/01-精益工具知识库/PPT/07-深度专题研究.pptx
+++ b/01-精益工具知识库/PPT/07-深度专题研究.pptx
@@ -1875,6 +1875,10 @@
           </a:solidFill>
           <a:ln/>
         </p:spPr>
+        <p:txBody>
+          <a:bodyPr/>
+          <a:p/>
+        </p:txBody>
       </p:sp>
       <p:sp>
         <p:nvSpPr>
@@ -1897,6 +1901,10 @@
           </a:solidFill>
           <a:ln/>
         </p:spPr>
+        <p:txBody>
+          <a:bodyPr/>
+          <a:p/>
+        </p:txBody>
       </p:sp>
       <p:sp>
         <p:nvSpPr>
@@ -1919,6 +1927,10 @@
           </a:solidFill>
           <a:ln/>
         </p:spPr>
+        <p:txBody>
+          <a:bodyPr/>
+          <a:p/>
+        </p:txBody>
       </p:sp>
       <p:sp>
         <p:nvSpPr>
@@ -1985,6 +1997,10 @@
             <a:prstDash val="solid"/>
           </a:ln>
         </p:spPr>
+        <p:txBody>
+          <a:bodyPr/>
+          <a:p/>
+        </p:txBody>
       </p:sp>
       <p:sp>
         <p:nvSpPr>
@@ -2058,7 +2074,7 @@
                 <a:ea typeface="Microsoft YaHei" pitchFamily="34" charset="-122"/>
                 <a:cs typeface="Microsoft YaHei" pitchFamily="34" charset="-120"/>
               </a:rPr>
-              <a:t>Deep Dive Research Topics  |  紧固件制造专用</a:t>
+              <a:t>Deep Dive Research Topics  |  制造专用</a:t>
             </a:r>
             <a:endParaRPr lang="en-US" sz="1600" dirty="0"/>
           </a:p>
@@ -2088,6 +2104,10 @@
             <a:prstDash val="solid"/>
           </a:ln>
         </p:spPr>
+        <p:txBody>
+          <a:bodyPr/>
+          <a:p/>
+        </p:txBody>
       </p:sp>
       <p:sp>
         <p:nvSpPr>
@@ -2262,6 +2282,10 @@
             <a:prstDash val="solid"/>
           </a:ln>
         </p:spPr>
+        <p:txBody>
+          <a:bodyPr/>
+          <a:p/>
+        </p:txBody>
       </p:sp>
       <p:sp>
         <p:nvSpPr>
@@ -2287,6 +2311,10 @@
             <a:prstDash val="solid"/>
           </a:ln>
         </p:spPr>
+        <p:txBody>
+          <a:bodyPr/>
+          <a:p/>
+        </p:txBody>
       </p:sp>
       <p:sp>
         <p:nvSpPr>
@@ -2390,6 +2418,10 @@
             <a:prstDash val="solid"/>
           </a:ln>
         </p:spPr>
+        <p:txBody>
+          <a:bodyPr/>
+          <a:p/>
+        </p:txBody>
       </p:sp>
       <p:sp>
         <p:nvSpPr>
@@ -2495,6 +2527,10 @@
             <a:prstDash val="solid"/>
           </a:ln>
         </p:spPr>
+        <p:txBody>
+          <a:bodyPr/>
+          <a:p/>
+        </p:txBody>
       </p:sp>
       <p:sp>
         <p:nvSpPr>
@@ -2600,6 +2636,10 @@
             <a:prstDash val="solid"/>
           </a:ln>
         </p:spPr>
+        <p:txBody>
+          <a:bodyPr/>
+          <a:p/>
+        </p:txBody>
       </p:sp>
       <p:sp>
         <p:nvSpPr>
@@ -2634,7 +2674,7 @@
                 <a:ea typeface="Microsoft YaHei" pitchFamily="34" charset="-122"/>
                 <a:cs typeface="Microsoft YaHei" pitchFamily="34" charset="-120"/>
               </a:rPr>
-              <a:t>冷镦机轴承磨损预警</a:t>
+              <a:t>机加工设备轴承磨损预警</a:t>
             </a:r>
             <a:endParaRPr lang="en-US" sz="900" dirty="0"/>
           </a:p>
@@ -2673,7 +2713,7 @@
                 <a:ea typeface="Microsoft YaHei" pitchFamily="34" charset="-122"/>
                 <a:cs typeface="Microsoft YaHei" pitchFamily="34" charset="-120"/>
               </a:rPr>
-              <a:t>搓丝机刀具断裂检测</a:t>
+              <a:t>精加工设备刀具断裂检测</a:t>
             </a:r>
             <a:endParaRPr lang="en-US" sz="900" dirty="0"/>
           </a:p>
@@ -2783,6 +2823,10 @@
             <a:prstDash val="solid"/>
           </a:ln>
         </p:spPr>
+        <p:txBody>
+          <a:bodyPr/>
+          <a:p/>
+        </p:txBody>
       </p:sp>
       <p:sp>
         <p:nvSpPr>
@@ -2888,6 +2932,10 @@
             <a:prstDash val="solid"/>
           </a:ln>
         </p:spPr>
+        <p:txBody>
+          <a:bodyPr/>
+          <a:p/>
+        </p:txBody>
       </p:sp>
       <p:sp>
         <p:nvSpPr>
@@ -3071,6 +3119,10 @@
             <a:prstDash val="solid"/>
           </a:ln>
         </p:spPr>
+        <p:txBody>
+          <a:bodyPr/>
+          <a:p/>
+        </p:txBody>
       </p:sp>
       <p:sp>
         <p:nvSpPr>
@@ -3176,6 +3228,10 @@
             <a:prstDash val="solid"/>
           </a:ln>
         </p:spPr>
+        <p:txBody>
+          <a:bodyPr/>
+          <a:p/>
+        </p:txBody>
       </p:sp>
       <p:sp>
         <p:nvSpPr>
@@ -3210,7 +3266,7 @@
                 <a:ea typeface="Microsoft YaHei" pitchFamily="34" charset="-122"/>
                 <a:cs typeface="Microsoft YaHei" pitchFamily="34" charset="-120"/>
               </a:rPr>
-              <a:t>冷镦负载变化监测</a:t>
+              <a:t>机加工负载变化监测</a:t>
             </a:r>
             <a:endParaRPr lang="en-US" sz="900" dirty="0"/>
           </a:p>
@@ -3398,6 +3454,10 @@
             <a:prstDash val="solid"/>
           </a:ln>
         </p:spPr>
+        <p:txBody>
+          <a:bodyPr/>
+          <a:p/>
+        </p:txBody>
       </p:sp>
       <p:sp>
         <p:nvSpPr>
@@ -3474,7 +3534,7 @@
                 <a:ea typeface="Microsoft YaHei" pitchFamily="34" charset="-122"/>
                 <a:cs typeface="Microsoft YaHei" pitchFamily="34" charset="-120"/>
               </a:rPr>
-              <a:t>冷镦机/搓丝机/热处理炉 + IoT传感器实时采集</a:t>
+              <a:t>机加工设备/精加工设备/热处理炉 + IoT传感器实时采集</a:t>
             </a:r>
             <a:endParaRPr lang="en-US" sz="850" dirty="0"/>
           </a:p>
@@ -3504,6 +3564,10 @@
             <a:prstDash val="solid"/>
           </a:ln>
         </p:spPr>
+        <p:txBody>
+          <a:bodyPr/>
+          <a:p/>
+        </p:txBody>
       </p:sp>
       <p:sp>
         <p:nvSpPr>
@@ -3531,6 +3595,10 @@
             <a:prstDash val="solid"/>
           </a:ln>
         </p:spPr>
+        <p:txBody>
+          <a:bodyPr/>
+          <a:p/>
+        </p:txBody>
       </p:sp>
       <p:sp>
         <p:nvSpPr>
@@ -3637,6 +3705,10 @@
             <a:prstDash val="solid"/>
           </a:ln>
         </p:spPr>
+        <p:txBody>
+          <a:bodyPr/>
+          <a:p/>
+        </p:txBody>
       </p:sp>
       <p:sp>
         <p:nvSpPr>
@@ -3664,6 +3736,10 @@
             <a:prstDash val="solid"/>
           </a:ln>
         </p:spPr>
+        <p:txBody>
+          <a:bodyPr/>
+          <a:p/>
+        </p:txBody>
       </p:sp>
       <p:sp>
         <p:nvSpPr>
@@ -3770,6 +3846,10 @@
             <a:prstDash val="solid"/>
           </a:ln>
         </p:spPr>
+        <p:txBody>
+          <a:bodyPr/>
+          <a:p/>
+        </p:txBody>
       </p:sp>
       <p:sp>
         <p:nvSpPr>
@@ -3797,6 +3877,10 @@
             <a:prstDash val="solid"/>
           </a:ln>
         </p:spPr>
+        <p:txBody>
+          <a:bodyPr/>
+          <a:p/>
+        </p:txBody>
       </p:sp>
       <p:sp>
         <p:nvSpPr>
@@ -3905,6 +3989,10 @@
             <a:prstDash val="solid"/>
           </a:ln>
         </p:spPr>
+        <p:txBody>
+          <a:bodyPr/>
+          <a:p/>
+        </p:txBody>
       </p:sp>
       <p:sp>
         <p:nvSpPr>
@@ -4010,6 +4098,10 @@
             <a:prstDash val="solid"/>
           </a:ln>
         </p:spPr>
+        <p:txBody>
+          <a:bodyPr/>
+          <a:p/>
+        </p:txBody>
       </p:sp>
       <p:sp>
         <p:nvSpPr>
@@ -4115,6 +4207,10 @@
             <a:prstDash val="solid"/>
           </a:ln>
         </p:spPr>
+        <p:txBody>
+          <a:bodyPr/>
+          <a:p/>
+        </p:txBody>
       </p:sp>
       <p:sp>
         <p:nvSpPr>
@@ -4220,6 +4316,10 @@
             <a:prstDash val="solid"/>
           </a:ln>
         </p:spPr>
+        <p:txBody>
+          <a:bodyPr/>
+          <a:p/>
+        </p:txBody>
       </p:sp>
       <p:sp>
         <p:nvSpPr>
@@ -4355,6 +4455,10 @@
             <a:prstDash val="solid"/>
           </a:ln>
         </p:spPr>
+        <p:txBody>
+          <a:bodyPr/>
+          <a:p/>
+        </p:txBody>
       </p:sp>
       <p:sp>
         <p:nvSpPr>
@@ -4380,6 +4484,10 @@
             <a:prstDash val="solid"/>
           </a:ln>
         </p:spPr>
+        <p:txBody>
+          <a:bodyPr/>
+          <a:p/>
+        </p:txBody>
       </p:sp>
       <p:sp>
         <p:nvSpPr>
@@ -4453,7 +4561,7 @@
                 <a:ea typeface="Microsoft YaHei" pitchFamily="34" charset="-122"/>
                 <a:cs typeface="Microsoft YaHei" pitchFamily="34" charset="-120"/>
               </a:rPr>
-              <a:t>AI/ML for Quality Prediction in Fastener Manufacturing</a:t>
+              <a:t>AI/ML for Quality Prediction in Discrete Manufacturing</a:t>
             </a:r>
             <a:endParaRPr lang="en-US" sz="1400" dirty="0"/>
           </a:p>
@@ -4483,6 +4591,10 @@
             <a:prstDash val="solid"/>
           </a:ln>
         </p:spPr>
+        <p:txBody>
+          <a:bodyPr/>
+          <a:p/>
+        </p:txBody>
       </p:sp>
       <p:sp>
         <p:nvSpPr>
@@ -4588,6 +4700,10 @@
             <a:prstDash val="solid"/>
           </a:ln>
         </p:spPr>
+        <p:txBody>
+          <a:bodyPr/>
+          <a:p/>
+        </p:txBody>
       </p:sp>
       <p:sp>
         <p:nvSpPr>
@@ -4693,6 +4809,10 @@
             <a:prstDash val="solid"/>
           </a:ln>
         </p:spPr>
+        <p:txBody>
+          <a:bodyPr/>
+          <a:p/>
+        </p:txBody>
       </p:sp>
       <p:sp>
         <p:nvSpPr>
@@ -4722,6 +4842,10 @@
             <a:prstDash val="solid"/>
           </a:ln>
         </p:spPr>
+        <p:txBody>
+          <a:bodyPr/>
+          <a:p/>
+        </p:txBody>
       </p:sp>
       <p:sp>
         <p:nvSpPr>
@@ -4793,6 +4917,10 @@
             <a:prstDash val="solid"/>
           </a:ln>
         </p:spPr>
+        <p:txBody>
+          <a:bodyPr/>
+          <a:p/>
+        </p:txBody>
       </p:sp>
       <p:sp>
         <p:nvSpPr>
@@ -4864,6 +4992,10 @@
             <a:prstDash val="solid"/>
           </a:ln>
         </p:spPr>
+        <p:txBody>
+          <a:bodyPr/>
+          <a:p/>
+        </p:txBody>
       </p:sp>
       <p:sp>
         <p:nvSpPr>
@@ -4935,6 +5067,10 @@
             <a:prstDash val="solid"/>
           </a:ln>
         </p:spPr>
+        <p:txBody>
+          <a:bodyPr/>
+          <a:p/>
+        </p:txBody>
       </p:sp>
       <p:sp>
         <p:nvSpPr>
@@ -4972,7 +5108,7 @@
                 <a:ea typeface="Microsoft YaHei" pitchFamily="34" charset="-122"/>
                 <a:cs typeface="Microsoft YaHei" pitchFamily="34" charset="-120"/>
               </a:rPr>
-              <a:t>应用: 冷镦裂纹预测、螺纹不完整预警</a:t>
+              <a:t>应用: 机加工裂纹预测、加工不完整预警</a:t>
             </a:r>
             <a:endParaRPr lang="en-US" sz="900" dirty="0"/>
           </a:p>
@@ -5004,6 +5140,10 @@
             <a:prstDash val="solid"/>
           </a:ln>
         </p:spPr>
+        <p:txBody>
+          <a:bodyPr/>
+          <a:p/>
+        </p:txBody>
       </p:sp>
       <p:sp>
         <p:nvSpPr>
@@ -5109,6 +5249,10 @@
             <a:prstDash val="solid"/>
           </a:ln>
         </p:spPr>
+        <p:txBody>
+          <a:bodyPr/>
+          <a:p/>
+        </p:txBody>
       </p:sp>
       <p:sp>
         <p:nvSpPr>
@@ -5138,6 +5282,10 @@
             <a:prstDash val="solid"/>
           </a:ln>
         </p:spPr>
+        <p:txBody>
+          <a:bodyPr/>
+          <a:p/>
+        </p:txBody>
       </p:sp>
       <p:sp>
         <p:nvSpPr>
@@ -5209,6 +5357,10 @@
             <a:prstDash val="solid"/>
           </a:ln>
         </p:spPr>
+        <p:txBody>
+          <a:bodyPr/>
+          <a:p/>
+        </p:txBody>
       </p:sp>
       <p:sp>
         <p:nvSpPr>
@@ -5280,6 +5432,10 @@
             <a:prstDash val="solid"/>
           </a:ln>
         </p:spPr>
+        <p:txBody>
+          <a:bodyPr/>
+          <a:p/>
+        </p:txBody>
       </p:sp>
       <p:sp>
         <p:nvSpPr>
@@ -5351,6 +5507,10 @@
             <a:prstDash val="solid"/>
           </a:ln>
         </p:spPr>
+        <p:txBody>
+          <a:bodyPr/>
+          <a:p/>
+        </p:txBody>
       </p:sp>
       <p:sp>
         <p:nvSpPr>
@@ -5388,7 +5548,7 @@
                 <a:ea typeface="Microsoft YaHei" pitchFamily="34" charset="-122"/>
                 <a:cs typeface="Microsoft YaHei" pitchFamily="34" charset="-120"/>
               </a:rPr>
-              <a:t>应用: 螺纹中径趋势预测、硬度分布预警</a:t>
+              <a:t>应用: 关键尺寸趋势预测、硬度分布预警</a:t>
             </a:r>
             <a:endParaRPr lang="en-US" sz="900" dirty="0"/>
           </a:p>
@@ -5420,6 +5580,10 @@
             <a:prstDash val="solid"/>
           </a:ln>
         </p:spPr>
+        <p:txBody>
+          <a:bodyPr/>
+          <a:p/>
+        </p:txBody>
       </p:sp>
       <p:sp>
         <p:nvSpPr>
@@ -5525,6 +5689,10 @@
             <a:prstDash val="solid"/>
           </a:ln>
         </p:spPr>
+        <p:txBody>
+          <a:bodyPr/>
+          <a:p/>
+        </p:txBody>
       </p:sp>
       <p:sp>
         <p:nvSpPr>
@@ -5554,6 +5722,10 @@
             <a:prstDash val="solid"/>
           </a:ln>
         </p:spPr>
+        <p:txBody>
+          <a:bodyPr/>
+          <a:p/>
+        </p:txBody>
       </p:sp>
       <p:sp>
         <p:nvSpPr>
@@ -5625,6 +5797,10 @@
             <a:prstDash val="solid"/>
           </a:ln>
         </p:spPr>
+        <p:txBody>
+          <a:bodyPr/>
+          <a:p/>
+        </p:txBody>
       </p:sp>
       <p:sp>
         <p:nvSpPr>
@@ -5662,7 +5838,7 @@
                 <a:ea typeface="Microsoft YaHei" pitchFamily="34" charset="-122"/>
                 <a:cs typeface="Microsoft YaHei" pitchFamily="34" charset="-120"/>
               </a:rPr>
-              <a:t>检测项: 表面裂纹/头部变形/螺纹缺损</a:t>
+              <a:t>检测项: 表面裂纹/端部变形/加工缺损</a:t>
             </a:r>
             <a:endParaRPr lang="en-US" sz="900" dirty="0"/>
           </a:p>
@@ -5696,6 +5872,10 @@
             <a:prstDash val="solid"/>
           </a:ln>
         </p:spPr>
+        <p:txBody>
+          <a:bodyPr/>
+          <a:p/>
+        </p:txBody>
       </p:sp>
       <p:sp>
         <p:nvSpPr>
@@ -5767,6 +5947,10 @@
             <a:prstDash val="solid"/>
           </a:ln>
         </p:spPr>
+        <p:txBody>
+          <a:bodyPr/>
+          <a:p/>
+        </p:txBody>
       </p:sp>
       <p:sp>
         <p:nvSpPr>
@@ -5836,6 +6020,10 @@
             <a:prstDash val="solid"/>
           </a:ln>
         </p:spPr>
+        <p:txBody>
+          <a:bodyPr/>
+          <a:p/>
+        </p:txBody>
       </p:sp>
       <p:sp>
         <p:nvSpPr>
@@ -5932,6 +6120,10 @@
             <a:prstDash val="solid"/>
           </a:ln>
         </p:spPr>
+        <p:txBody>
+          <a:bodyPr/>
+          <a:p/>
+        </p:txBody>
       </p:sp>
       <p:sp>
         <p:nvSpPr>
@@ -6039,6 +6231,10 @@
             <a:prstDash val="solid"/>
           </a:ln>
         </p:spPr>
+        <p:txBody>
+          <a:bodyPr/>
+          <a:p/>
+        </p:txBody>
       </p:sp>
       <p:sp>
         <p:nvSpPr>
@@ -6144,6 +6340,10 @@
             <a:prstDash val="solid"/>
           </a:ln>
         </p:spPr>
+        <p:txBody>
+          <a:bodyPr/>
+          <a:p/>
+        </p:txBody>
       </p:sp>
       <p:sp>
         <p:nvSpPr>
@@ -6327,6 +6527,10 @@
             <a:prstDash val="solid"/>
           </a:ln>
         </p:spPr>
+        <p:txBody>
+          <a:bodyPr/>
+          <a:p/>
+        </p:txBody>
       </p:sp>
       <p:sp>
         <p:nvSpPr>
@@ -6432,6 +6636,10 @@
             <a:prstDash val="solid"/>
           </a:ln>
         </p:spPr>
+        <p:txBody>
+          <a:bodyPr/>
+          <a:p/>
+        </p:txBody>
       </p:sp>
       <p:sp>
         <p:nvSpPr>
@@ -6615,6 +6823,10 @@
             <a:prstDash val="solid"/>
           </a:ln>
         </p:spPr>
+        <p:txBody>
+          <a:bodyPr/>
+          <a:p/>
+        </p:txBody>
       </p:sp>
       <p:sp>
         <p:nvSpPr>
@@ -6720,6 +6932,10 @@
             <a:prstDash val="solid"/>
           </a:ln>
         </p:spPr>
+        <p:txBody>
+          <a:bodyPr/>
+          <a:p/>
+        </p:txBody>
       </p:sp>
       <p:sp>
         <p:nvSpPr>
@@ -6901,6 +7117,10 @@
             <a:prstDash val="solid"/>
           </a:ln>
         </p:spPr>
+        <p:txBody>
+          <a:bodyPr/>
+          <a:p/>
+        </p:txBody>
       </p:sp>
       <p:sp>
         <p:nvSpPr>
@@ -6997,6 +7217,10 @@
             <a:prstDash val="solid"/>
           </a:ln>
         </p:spPr>
+        <p:txBody>
+          <a:bodyPr/>
+          <a:p/>
+        </p:txBody>
       </p:sp>
       <p:sp>
         <p:nvSpPr>
@@ -7061,6 +7285,10 @@
             <a:prstDash val="solid"/>
           </a:ln>
         </p:spPr>
+        <p:txBody>
+          <a:bodyPr/>
+          <a:p/>
+        </p:txBody>
       </p:sp>
       <p:sp>
         <p:nvSpPr>
@@ -7173,7 +7401,7 @@
                 <a:ea typeface="Microsoft YaHei" pitchFamily="34" charset="-122"/>
                 <a:cs typeface="Microsoft YaHei" pitchFamily="34" charset="-120"/>
               </a:rPr>
-              <a:t>Change Management  |  Leading Transformation in Fastener Plants</a:t>
+              <a:t>Change Management  |  Leading Transformation in Manufacturing Plants</a:t>
             </a:r>
             <a:endParaRPr lang="en-US" sz="1600" dirty="0"/>
           </a:p>
@@ -7203,6 +7431,10 @@
             <a:prstDash val="solid"/>
           </a:ln>
         </p:spPr>
+        <p:txBody>
+          <a:bodyPr/>
+          <a:p/>
+        </p:txBody>
       </p:sp>
       <p:sp>
         <p:nvSpPr>
@@ -7228,6 +7460,10 @@
             <a:prstDash val="solid"/>
           </a:ln>
         </p:spPr>
+        <p:txBody>
+          <a:bodyPr/>
+          <a:p/>
+        </p:txBody>
       </p:sp>
       <p:sp>
         <p:nvSpPr>
@@ -7292,6 +7528,10 @@
             <a:prstDash val="solid"/>
           </a:ln>
         </p:spPr>
+        <p:txBody>
+          <a:bodyPr/>
+          <a:p/>
+        </p:txBody>
       </p:sp>
       <p:sp>
         <p:nvSpPr>
@@ -7388,6 +7628,10 @@
             <a:prstDash val="solid"/>
           </a:ln>
         </p:spPr>
+        <p:txBody>
+          <a:bodyPr/>
+          <a:p/>
+        </p:txBody>
       </p:sp>
       <p:sp>
         <p:nvSpPr>
@@ -7413,6 +7657,10 @@
             <a:prstDash val="solid"/>
           </a:ln>
         </p:spPr>
+        <p:txBody>
+          <a:bodyPr/>
+          <a:p/>
+        </p:txBody>
       </p:sp>
       <p:sp>
         <p:nvSpPr>
@@ -7486,7 +7734,7 @@
                 <a:ea typeface="Microsoft YaHei" pitchFamily="34" charset="-122"/>
                 <a:cs typeface="Microsoft YaHei" pitchFamily="34" charset="-120"/>
               </a:rPr>
-              <a:t>Kotter's 8-Step Change Model — Fastener Manufacturing Application</a:t>
+              <a:t>Kotter's 8-Step Change Model — Discrete Manufacturing Application</a:t>
             </a:r>
             <a:endParaRPr lang="en-US" sz="1400" dirty="0"/>
           </a:p>
@@ -7516,6 +7764,10 @@
             <a:prstDash val="solid"/>
           </a:ln>
         </p:spPr>
+        <p:txBody>
+          <a:bodyPr/>
+          <a:p/>
+        </p:txBody>
       </p:sp>
       <p:sp>
         <p:nvSpPr>
@@ -7621,6 +7873,10 @@
             <a:prstDash val="solid"/>
           </a:ln>
         </p:spPr>
+        <p:txBody>
+          <a:bodyPr/>
+          <a:p/>
+        </p:txBody>
       </p:sp>
       <p:sp>
         <p:nvSpPr>
@@ -7648,6 +7904,10 @@
             <a:prstDash val="solid"/>
           </a:ln>
         </p:spPr>
+        <p:txBody>
+          <a:bodyPr/>
+          <a:p/>
+        </p:txBody>
       </p:sp>
       <p:sp>
         <p:nvSpPr>
@@ -7792,6 +8052,10 @@
             <a:prstDash val="solid"/>
           </a:ln>
         </p:spPr>
+        <p:txBody>
+          <a:bodyPr/>
+          <a:p/>
+        </p:txBody>
       </p:sp>
       <p:sp>
         <p:nvSpPr>
@@ -7859,6 +8123,10 @@
             <a:prstDash val="solid"/>
           </a:ln>
         </p:spPr>
+        <p:txBody>
+          <a:bodyPr/>
+          <a:p/>
+        </p:txBody>
       </p:sp>
       <p:sp>
         <p:nvSpPr>
@@ -7886,6 +8154,10 @@
             <a:prstDash val="solid"/>
           </a:ln>
         </p:spPr>
+        <p:txBody>
+          <a:bodyPr/>
+          <a:p/>
+        </p:txBody>
       </p:sp>
       <p:sp>
         <p:nvSpPr>
@@ -7913,6 +8185,10 @@
             <a:prstDash val="solid"/>
           </a:ln>
         </p:spPr>
+        <p:txBody>
+          <a:bodyPr/>
+          <a:p/>
+        </p:txBody>
       </p:sp>
       <p:sp>
         <p:nvSpPr>
@@ -8057,6 +8333,10 @@
             <a:prstDash val="solid"/>
           </a:ln>
         </p:spPr>
+        <p:txBody>
+          <a:bodyPr/>
+          <a:p/>
+        </p:txBody>
       </p:sp>
       <p:sp>
         <p:nvSpPr>
@@ -8124,6 +8404,10 @@
             <a:prstDash val="solid"/>
           </a:ln>
         </p:spPr>
+        <p:txBody>
+          <a:bodyPr/>
+          <a:p/>
+        </p:txBody>
       </p:sp>
       <p:sp>
         <p:nvSpPr>
@@ -8151,6 +8435,10 @@
             <a:prstDash val="solid"/>
           </a:ln>
         </p:spPr>
+        <p:txBody>
+          <a:bodyPr/>
+          <a:p/>
+        </p:txBody>
       </p:sp>
       <p:sp>
         <p:nvSpPr>
@@ -8178,6 +8466,10 @@
             <a:prstDash val="solid"/>
           </a:ln>
         </p:spPr>
+        <p:txBody>
+          <a:bodyPr/>
+          <a:p/>
+        </p:txBody>
       </p:sp>
       <p:sp>
         <p:nvSpPr>
@@ -8322,6 +8614,10 @@
             <a:prstDash val="solid"/>
           </a:ln>
         </p:spPr>
+        <p:txBody>
+          <a:bodyPr/>
+          <a:p/>
+        </p:txBody>
       </p:sp>
       <p:sp>
         <p:nvSpPr>
@@ -8389,6 +8685,10 @@
             <a:prstDash val="solid"/>
           </a:ln>
         </p:spPr>
+        <p:txBody>
+          <a:bodyPr/>
+          <a:p/>
+        </p:txBody>
       </p:sp>
       <p:sp>
         <p:nvSpPr>
@@ -8416,6 +8716,10 @@
             <a:prstDash val="solid"/>
           </a:ln>
         </p:spPr>
+        <p:txBody>
+          <a:bodyPr/>
+          <a:p/>
+        </p:txBody>
       </p:sp>
       <p:sp>
         <p:nvSpPr>
@@ -8443,6 +8747,10 @@
             <a:prstDash val="solid"/>
           </a:ln>
         </p:spPr>
+        <p:txBody>
+          <a:bodyPr/>
+          <a:p/>
+        </p:txBody>
       </p:sp>
       <p:sp>
         <p:nvSpPr>
@@ -8587,6 +8895,10 @@
             <a:prstDash val="solid"/>
           </a:ln>
         </p:spPr>
+        <p:txBody>
+          <a:bodyPr/>
+          <a:p/>
+        </p:txBody>
       </p:sp>
       <p:sp>
         <p:nvSpPr>
@@ -8624,7 +8936,7 @@
                 <a:ea typeface="Microsoft YaHei" pitchFamily="34" charset="-122"/>
                 <a:cs typeface="Microsoft YaHei" pitchFamily="34" charset="-120"/>
               </a:rPr>
-              <a:t>全员大会、看板、班前会反复传递，用螺栓实物展示缺陷成本</a:t>
+              <a:t>全员大会、看板、班前会反复传递，用工件实物展示缺陷成本</a:t>
             </a:r>
             <a:endParaRPr lang="en-US" sz="800" dirty="0"/>
           </a:p>
@@ -8656,6 +8968,10 @@
             <a:prstDash val="solid"/>
           </a:ln>
         </p:spPr>
+        <p:txBody>
+          <a:bodyPr/>
+          <a:p/>
+        </p:txBody>
       </p:sp>
       <p:sp>
         <p:nvSpPr>
@@ -8683,6 +8999,10 @@
             <a:prstDash val="solid"/>
           </a:ln>
         </p:spPr>
+        <p:txBody>
+          <a:bodyPr/>
+          <a:p/>
+        </p:txBody>
       </p:sp>
       <p:sp>
         <p:nvSpPr>
@@ -8827,6 +9147,10 @@
             <a:prstDash val="solid"/>
           </a:ln>
         </p:spPr>
+        <p:txBody>
+          <a:bodyPr/>
+          <a:p/>
+        </p:txBody>
       </p:sp>
       <p:sp>
         <p:nvSpPr>
@@ -8894,6 +9218,10 @@
             <a:prstDash val="solid"/>
           </a:ln>
         </p:spPr>
+        <p:txBody>
+          <a:bodyPr/>
+          <a:p/>
+        </p:txBody>
       </p:sp>
       <p:sp>
         <p:nvSpPr>
@@ -8921,6 +9249,10 @@
             <a:prstDash val="solid"/>
           </a:ln>
         </p:spPr>
+        <p:txBody>
+          <a:bodyPr/>
+          <a:p/>
+        </p:txBody>
       </p:sp>
       <p:sp>
         <p:nvSpPr>
@@ -8948,6 +9280,10 @@
             <a:prstDash val="solid"/>
           </a:ln>
         </p:spPr>
+        <p:txBody>
+          <a:bodyPr/>
+          <a:p/>
+        </p:txBody>
       </p:sp>
       <p:sp>
         <p:nvSpPr>
@@ -9092,6 +9428,10 @@
             <a:prstDash val="solid"/>
           </a:ln>
         </p:spPr>
+        <p:txBody>
+          <a:bodyPr/>
+          <a:p/>
+        </p:txBody>
       </p:sp>
       <p:sp>
         <p:nvSpPr>
@@ -9159,6 +9499,10 @@
             <a:prstDash val="solid"/>
           </a:ln>
         </p:spPr>
+        <p:txBody>
+          <a:bodyPr/>
+          <a:p/>
+        </p:txBody>
       </p:sp>
       <p:sp>
         <p:nvSpPr>
@@ -9186,6 +9530,10 @@
             <a:prstDash val="solid"/>
           </a:ln>
         </p:spPr>
+        <p:txBody>
+          <a:bodyPr/>
+          <a:p/>
+        </p:txBody>
       </p:sp>
       <p:sp>
         <p:nvSpPr>
@@ -9213,6 +9561,10 @@
             <a:prstDash val="solid"/>
           </a:ln>
         </p:spPr>
+        <p:txBody>
+          <a:bodyPr/>
+          <a:p/>
+        </p:txBody>
       </p:sp>
       <p:sp>
         <p:nvSpPr>
@@ -9357,6 +9709,10 @@
             <a:prstDash val="solid"/>
           </a:ln>
         </p:spPr>
+        <p:txBody>
+          <a:bodyPr/>
+          <a:p/>
+        </p:txBody>
       </p:sp>
       <p:sp>
         <p:nvSpPr>
@@ -9424,6 +9780,10 @@
             <a:prstDash val="solid"/>
           </a:ln>
         </p:spPr>
+        <p:txBody>
+          <a:bodyPr/>
+          <a:p/>
+        </p:txBody>
       </p:sp>
       <p:sp>
         <p:nvSpPr>
@@ -9451,6 +9811,10 @@
             <a:prstDash val="solid"/>
           </a:ln>
         </p:spPr>
+        <p:txBody>
+          <a:bodyPr/>
+          <a:p/>
+        </p:txBody>
       </p:sp>
       <p:sp>
         <p:nvSpPr>
@@ -9478,6 +9842,10 @@
             <a:prstDash val="solid"/>
           </a:ln>
         </p:spPr>
+        <p:txBody>
+          <a:bodyPr/>
+          <a:p/>
+        </p:txBody>
       </p:sp>
       <p:sp>
         <p:nvSpPr>
@@ -9622,6 +9990,10 @@
             <a:prstDash val="solid"/>
           </a:ln>
         </p:spPr>
+        <p:txBody>
+          <a:bodyPr/>
+          <a:p/>
+        </p:txBody>
       </p:sp>
       <p:sp>
         <p:nvSpPr>
@@ -9721,6 +10093,10 @@
             <a:prstDash val="solid"/>
           </a:ln>
         </p:spPr>
+        <p:txBody>
+          <a:bodyPr/>
+          <a:p/>
+        </p:txBody>
       </p:sp>
       <p:sp>
         <p:nvSpPr>
@@ -9746,6 +10122,10 @@
             <a:prstDash val="solid"/>
           </a:ln>
         </p:spPr>
+        <p:txBody>
+          <a:bodyPr/>
+          <a:p/>
+        </p:txBody>
       </p:sp>
       <p:sp>
         <p:nvSpPr>
@@ -9849,6 +10229,10 @@
             <a:prstDash val="solid"/>
           </a:ln>
         </p:spPr>
+        <p:txBody>
+          <a:bodyPr/>
+          <a:p/>
+        </p:txBody>
       </p:sp>
       <p:sp>
         <p:nvSpPr>
@@ -9954,6 +10338,10 @@
             <a:prstDash val="solid"/>
           </a:ln>
         </p:spPr>
+        <p:txBody>
+          <a:bodyPr/>
+          <a:p/>
+        </p:txBody>
       </p:sp>
       <p:sp>
         <p:nvSpPr>
@@ -10061,6 +10449,10 @@
             <a:prstDash val="solid"/>
           </a:ln>
         </p:spPr>
+        <p:txBody>
+          <a:bodyPr/>
+          <a:p/>
+        </p:txBody>
       </p:sp>
       <p:sp>
         <p:nvSpPr>
@@ -10125,6 +10517,10 @@
             <a:prstDash val="solid"/>
           </a:ln>
         </p:spPr>
+        <p:txBody>
+          <a:bodyPr/>
+          <a:p/>
+        </p:txBody>
       </p:sp>
       <p:sp>
         <p:nvSpPr>
@@ -10191,6 +10587,10 @@
             <a:prstDash val="solid"/>
           </a:ln>
         </p:spPr>
+        <p:txBody>
+          <a:bodyPr/>
+          <a:p/>
+        </p:txBody>
       </p:sp>
       <p:sp>
         <p:nvSpPr>
@@ -10255,6 +10655,10 @@
             <a:prstDash val="solid"/>
           </a:ln>
         </p:spPr>
+        <p:txBody>
+          <a:bodyPr/>
+          <a:p/>
+        </p:txBody>
       </p:sp>
       <p:sp>
         <p:nvSpPr>
@@ -10321,6 +10725,10 @@
             <a:prstDash val="solid"/>
           </a:ln>
         </p:spPr>
+        <p:txBody>
+          <a:bodyPr/>
+          <a:p/>
+        </p:txBody>
       </p:sp>
       <p:sp>
         <p:nvSpPr>
@@ -10385,6 +10793,10 @@
             <a:prstDash val="solid"/>
           </a:ln>
         </p:spPr>
+        <p:txBody>
+          <a:bodyPr/>
+          <a:p/>
+        </p:txBody>
       </p:sp>
       <p:sp>
         <p:nvSpPr>
@@ -10451,6 +10863,10 @@
             <a:prstDash val="solid"/>
           </a:ln>
         </p:spPr>
+        <p:txBody>
+          <a:bodyPr/>
+          <a:p/>
+        </p:txBody>
       </p:sp>
       <p:sp>
         <p:nvSpPr>
@@ -10515,6 +10931,10 @@
             <a:prstDash val="solid"/>
           </a:ln>
         </p:spPr>
+        <p:txBody>
+          <a:bodyPr/>
+          <a:p/>
+        </p:txBody>
       </p:sp>
       <p:sp>
         <p:nvSpPr>
@@ -10581,6 +11001,10 @@
             <a:prstDash val="solid"/>
           </a:ln>
         </p:spPr>
+        <p:txBody>
+          <a:bodyPr/>
+          <a:p/>
+        </p:txBody>
       </p:sp>
       <p:sp>
         <p:nvSpPr>
@@ -10645,6 +11069,10 @@
             <a:prstDash val="solid"/>
           </a:ln>
         </p:spPr>
+        <p:txBody>
+          <a:bodyPr/>
+          <a:p/>
+        </p:txBody>
       </p:sp>
       <p:sp>
         <p:nvSpPr>
@@ -10711,6 +11139,10 @@
             <a:prstDash val="solid"/>
           </a:ln>
         </p:spPr>
+        <p:txBody>
+          <a:bodyPr/>
+          <a:p/>
+        </p:txBody>
       </p:sp>
       <p:sp>
         <p:nvSpPr>
@@ -10860,6 +11292,10 @@
             <a:prstDash val="solid"/>
           </a:ln>
         </p:spPr>
+        <p:txBody>
+          <a:bodyPr/>
+          <a:p/>
+        </p:txBody>
       </p:sp>
       <p:sp>
         <p:nvSpPr>
@@ -11009,6 +11445,10 @@
             <a:prstDash val="solid"/>
           </a:ln>
         </p:spPr>
+        <p:txBody>
+          <a:bodyPr/>
+          <a:p/>
+        </p:txBody>
       </p:sp>
       <p:sp>
         <p:nvSpPr>
@@ -11158,6 +11598,10 @@
             <a:prstDash val="solid"/>
           </a:ln>
         </p:spPr>
+        <p:txBody>
+          <a:bodyPr/>
+          <a:p/>
+        </p:txBody>
       </p:sp>
       <p:sp>
         <p:nvSpPr>
@@ -11307,6 +11751,10 @@
             <a:prstDash val="solid"/>
           </a:ln>
         </p:spPr>
+        <p:txBody>
+          <a:bodyPr/>
+          <a:p/>
+        </p:txBody>
       </p:sp>
       <p:sp>
         <p:nvSpPr>
@@ -11403,6 +11851,10 @@
             <a:prstDash val="solid"/>
           </a:ln>
         </p:spPr>
+        <p:txBody>
+          <a:bodyPr/>
+          <a:p/>
+        </p:txBody>
       </p:sp>
       <p:sp>
         <p:nvSpPr>
@@ -11467,6 +11919,10 @@
             <a:prstDash val="solid"/>
           </a:ln>
         </p:spPr>
+        <p:txBody>
+          <a:bodyPr/>
+          <a:p/>
+        </p:txBody>
       </p:sp>
       <p:sp>
         <p:nvSpPr>
@@ -11579,7 +12035,7 @@
                 <a:ea typeface="Microsoft YaHei" pitchFamily="34" charset="-122"/>
                 <a:cs typeface="Microsoft YaHei" pitchFamily="34" charset="-120"/>
               </a:rPr>
-              <a:t>Quality Standards Integration  |  IATF 16949 &amp; CQI-9 for Fasteners</a:t>
+              <a:t>Quality Standards Integration  |  IATF 16949 &amp; CQI-9 for Manufacturings</a:t>
             </a:r>
             <a:endParaRPr lang="en-US" sz="1600" dirty="0"/>
           </a:p>
@@ -11609,6 +12065,10 @@
             <a:prstDash val="solid"/>
           </a:ln>
         </p:spPr>
+        <p:txBody>
+          <a:bodyPr/>
+          <a:p/>
+        </p:txBody>
       </p:sp>
       <p:sp>
         <p:nvSpPr>
@@ -11634,6 +12094,10 @@
             <a:prstDash val="solid"/>
           </a:ln>
         </p:spPr>
+        <p:txBody>
+          <a:bodyPr/>
+          <a:p/>
+        </p:txBody>
       </p:sp>
       <p:sp>
         <p:nvSpPr>
@@ -11698,6 +12162,10 @@
             <a:prstDash val="solid"/>
           </a:ln>
         </p:spPr>
+        <p:txBody>
+          <a:bodyPr/>
+          <a:p/>
+        </p:txBody>
       </p:sp>
       <p:sp>
         <p:nvSpPr>
@@ -11794,6 +12262,10 @@
             <a:prstDash val="solid"/>
           </a:ln>
         </p:spPr>
+        <p:txBody>
+          <a:bodyPr/>
+          <a:p/>
+        </p:txBody>
       </p:sp>
       <p:sp>
         <p:nvSpPr>
@@ -11819,6 +12291,10 @@
             <a:prstDash val="solid"/>
           </a:ln>
         </p:spPr>
+        <p:txBody>
+          <a:bodyPr/>
+          <a:p/>
+        </p:txBody>
       </p:sp>
       <p:sp>
         <p:nvSpPr>
@@ -11922,6 +12398,10 @@
             <a:prstDash val="solid"/>
           </a:ln>
         </p:spPr>
+        <p:txBody>
+          <a:bodyPr/>
+          <a:p/>
+        </p:txBody>
       </p:sp>
       <p:sp>
         <p:nvSpPr>
@@ -12025,6 +12505,10 @@
             <a:prstDash val="solid"/>
           </a:ln>
         </p:spPr>
+        <p:txBody>
+          <a:bodyPr/>
+          <a:p/>
+        </p:txBody>
       </p:sp>
       <p:sp>
         <p:nvSpPr>
@@ -12137,7 +12621,7 @@
                 <a:ea typeface="Microsoft YaHei" pitchFamily="34" charset="-122"/>
                 <a:cs typeface="Microsoft YaHei" pitchFamily="34" charset="-120"/>
               </a:rPr>
-              <a:t>紧固件实施要点</a:t>
+              <a:t>产品实施要点</a:t>
             </a:r>
             <a:endParaRPr lang="en-US" sz="1000" dirty="0"/>
           </a:p>
@@ -12167,6 +12651,10 @@
             <a:prstDash val="solid"/>
           </a:ln>
         </p:spPr>
+        <p:txBody>
+          <a:bodyPr/>
+          <a:p/>
+        </p:txBody>
       </p:sp>
       <p:sp>
         <p:nvSpPr>
@@ -12309,6 +12797,10 @@
             <a:prstDash val="solid"/>
           </a:ln>
         </p:spPr>
+        <p:txBody>
+          <a:bodyPr/>
+          <a:p/>
+        </p:txBody>
       </p:sp>
       <p:sp>
         <p:nvSpPr>
@@ -12421,7 +12913,7 @@
                 <a:ea typeface="Microsoft YaHei" pitchFamily="34" charset="-122"/>
                 <a:cs typeface="Microsoft YaHei" pitchFamily="34" charset="-120"/>
               </a:rPr>
-              <a:t>在冷镦/搓丝/热处理工序设置防错装置，防止缺陷流出</a:t>
+              <a:t>在机加工/精加工/热处理工序设置防错装置，防止缺陷流出</a:t>
             </a:r>
             <a:endParaRPr lang="en-US" sz="950" dirty="0"/>
           </a:p>
@@ -12451,6 +12943,10 @@
             <a:prstDash val="solid"/>
           </a:ln>
         </p:spPr>
+        <p:txBody>
+          <a:bodyPr/>
+          <a:p/>
+        </p:txBody>
       </p:sp>
       <p:sp>
         <p:nvSpPr>
@@ -12563,7 +13059,7 @@
                 <a:ea typeface="Microsoft YaHei" pitchFamily="34" charset="-122"/>
                 <a:cs typeface="Microsoft YaHei" pitchFamily="34" charset="-120"/>
               </a:rPr>
-              <a:t>标准作业确保过程稳定性，SPC监控关键尺寸如螺纹中径</a:t>
+              <a:t>标准作业确保过程稳定性，SPC监控关键尺寸如关键尺寸</a:t>
             </a:r>
             <a:endParaRPr lang="en-US" sz="950" dirty="0"/>
           </a:p>
@@ -12593,6 +13089,10 @@
             <a:prstDash val="solid"/>
           </a:ln>
         </p:spPr>
+        <p:txBody>
+          <a:bodyPr/>
+          <a:p/>
+        </p:txBody>
       </p:sp>
       <p:sp>
         <p:nvSpPr>
@@ -12735,6 +13235,10 @@
             <a:prstDash val="solid"/>
           </a:ln>
         </p:spPr>
+        <p:txBody>
+          <a:bodyPr/>
+          <a:p/>
+        </p:txBody>
       </p:sp>
       <p:sp>
         <p:nvSpPr>
@@ -12879,6 +13383,10 @@
             <a:prstDash val="solid"/>
           </a:ln>
         </p:spPr>
+        <p:txBody>
+          <a:bodyPr/>
+          <a:p/>
+        </p:txBody>
       </p:sp>
       <p:sp>
         <p:nvSpPr>
@@ -12987,6 +13495,10 @@
             <a:prstDash val="solid"/>
           </a:ln>
         </p:spPr>
+        <p:txBody>
+          <a:bodyPr/>
+          <a:p/>
+        </p:txBody>
       </p:sp>
       <p:sp>
         <p:nvSpPr>
@@ -13095,6 +13607,10 @@
             <a:prstDash val="solid"/>
           </a:ln>
         </p:spPr>
+        <p:txBody>
+          <a:bodyPr/>
+          <a:p/>
+        </p:txBody>
       </p:sp>
       <p:sp>
         <p:nvSpPr>
@@ -13233,6 +13749,10 @@
             <a:prstDash val="solid"/>
           </a:ln>
         </p:spPr>
+        <p:txBody>
+          <a:bodyPr/>
+          <a:p/>
+        </p:txBody>
       </p:sp>
       <p:sp>
         <p:nvSpPr>
@@ -13258,6 +13778,10 @@
             <a:prstDash val="solid"/>
           </a:ln>
         </p:spPr>
+        <p:txBody>
+          <a:bodyPr/>
+          <a:p/>
+        </p:txBody>
       </p:sp>
       <p:sp>
         <p:nvSpPr>
@@ -13361,6 +13885,10 @@
             <a:prstDash val="solid"/>
           </a:ln>
         </p:spPr>
+        <p:txBody>
+          <a:bodyPr/>
+          <a:p/>
+        </p:txBody>
       </p:sp>
       <p:sp>
         <p:nvSpPr>
@@ -13466,6 +13994,10 @@
             <a:prstDash val="solid"/>
           </a:ln>
         </p:spPr>
+        <p:txBody>
+          <a:bodyPr/>
+          <a:p/>
+        </p:txBody>
       </p:sp>
       <p:sp>
         <p:nvSpPr>
@@ -13493,6 +14025,10 @@
             <a:prstDash val="solid"/>
           </a:ln>
         </p:spPr>
+        <p:txBody>
+          <a:bodyPr/>
+          <a:p/>
+        </p:txBody>
       </p:sp>
       <p:sp>
         <p:nvSpPr>
@@ -13518,6 +14054,10 @@
             <a:prstDash val="solid"/>
           </a:ln>
         </p:spPr>
+        <p:txBody>
+          <a:bodyPr/>
+          <a:p/>
+        </p:txBody>
       </p:sp>
       <p:sp>
         <p:nvSpPr>
@@ -13694,6 +14234,10 @@
             <a:prstDash val="solid"/>
           </a:ln>
         </p:spPr>
+        <p:txBody>
+          <a:bodyPr/>
+          <a:p/>
+        </p:txBody>
       </p:sp>
       <p:sp>
         <p:nvSpPr>
@@ -13721,6 +14265,10 @@
             <a:prstDash val="solid"/>
           </a:ln>
         </p:spPr>
+        <p:txBody>
+          <a:bodyPr/>
+          <a:p/>
+        </p:txBody>
       </p:sp>
       <p:sp>
         <p:nvSpPr>
@@ -13746,6 +14294,10 @@
             <a:prstDash val="solid"/>
           </a:ln>
         </p:spPr>
+        <p:txBody>
+          <a:bodyPr/>
+          <a:p/>
+        </p:txBody>
       </p:sp>
       <p:sp>
         <p:nvSpPr>
@@ -13944,6 +14496,10 @@
             <a:prstDash val="solid"/>
           </a:ln>
         </p:spPr>
+        <p:txBody>
+          <a:bodyPr/>
+          <a:p/>
+        </p:txBody>
       </p:sp>
       <p:sp>
         <p:nvSpPr>
@@ -14049,6 +14605,10 @@
             <a:prstDash val="solid"/>
           </a:ln>
         </p:spPr>
+        <p:txBody>
+          <a:bodyPr/>
+          <a:p/>
+        </p:txBody>
       </p:sp>
       <p:sp>
         <p:nvSpPr>
@@ -14086,7 +14646,7 @@
                 <a:ea typeface="Microsoft YaHei" pitchFamily="34" charset="-122"/>
                 <a:cs typeface="Microsoft YaHei" pitchFamily="34" charset="-120"/>
               </a:rPr>
-              <a:t>直接影响螺栓抗拉/硬度</a:t>
+              <a:t>直接影响工件抗拉/硬度</a:t>
             </a:r>
             <a:endParaRPr lang="en-US" sz="800" dirty="0"/>
           </a:p>
@@ -14118,6 +14678,10 @@
             <a:prstDash val="solid"/>
           </a:ln>
         </p:spPr>
+        <p:txBody>
+          <a:bodyPr/>
+          <a:p/>
+        </p:txBody>
       </p:sp>
       <p:sp>
         <p:nvSpPr>
@@ -14223,6 +14787,10 @@
             <a:prstDash val="solid"/>
           </a:ln>
         </p:spPr>
+        <p:txBody>
+          <a:bodyPr/>
+          <a:p/>
+        </p:txBody>
       </p:sp>
       <p:sp>
         <p:nvSpPr>
@@ -14292,6 +14860,10 @@
             <a:prstDash val="solid"/>
           </a:ln>
         </p:spPr>
+        <p:txBody>
+          <a:bodyPr/>
+          <a:p/>
+        </p:txBody>
       </p:sp>
       <p:sp>
         <p:nvSpPr>
@@ -14397,6 +14969,10 @@
             <a:prstDash val="solid"/>
           </a:ln>
         </p:spPr>
+        <p:txBody>
+          <a:bodyPr/>
+          <a:p/>
+        </p:txBody>
       </p:sp>
       <p:sp>
         <p:nvSpPr>
@@ -14466,6 +15042,10 @@
             <a:prstDash val="solid"/>
           </a:ln>
         </p:spPr>
+        <p:txBody>
+          <a:bodyPr/>
+          <a:p/>
+        </p:txBody>
       </p:sp>
       <p:sp>
         <p:nvSpPr>
@@ -14571,6 +15151,10 @@
             <a:prstDash val="solid"/>
           </a:ln>
         </p:spPr>
+        <p:txBody>
+          <a:bodyPr/>
+          <a:p/>
+        </p:txBody>
       </p:sp>
       <p:sp>
         <p:nvSpPr>
@@ -14640,6 +15224,10 @@
             <a:prstDash val="solid"/>
           </a:ln>
         </p:spPr>
+        <p:txBody>
+          <a:bodyPr/>
+          <a:p/>
+        </p:txBody>
       </p:sp>
       <p:sp>
         <p:nvSpPr>
@@ -14745,6 +15333,10 @@
             <a:prstDash val="solid"/>
           </a:ln>
         </p:spPr>
+        <p:txBody>
+          <a:bodyPr/>
+          <a:p/>
+        </p:txBody>
       </p:sp>
       <p:sp>
         <p:nvSpPr>
@@ -14844,6 +15436,10 @@
             <a:prstDash val="solid"/>
           </a:ln>
         </p:spPr>
+        <p:txBody>
+          <a:bodyPr/>
+          <a:p/>
+        </p:txBody>
       </p:sp>
       <p:sp>
         <p:nvSpPr>
@@ -14908,6 +15504,10 @@
             <a:prstDash val="solid"/>
           </a:ln>
         </p:spPr>
+        <p:txBody>
+          <a:bodyPr/>
+          <a:p/>
+        </p:txBody>
       </p:sp>
       <p:sp>
         <p:nvSpPr>
@@ -15020,7 +15620,7 @@
                 <a:ea typeface="Microsoft YaHei" pitchFamily="34" charset="-122"/>
                 <a:cs typeface="Microsoft YaHei" pitchFamily="34" charset="-120"/>
               </a:rPr>
-              <a:t>Lean Digitalization  |  Industry 4.0 for Fastener Manufacturing</a:t>
+              <a:t>Lean Digitalization  |  Industry 4.0 for Discrete Manufacturing</a:t>
             </a:r>
             <a:endParaRPr lang="en-US" sz="1600" dirty="0"/>
           </a:p>
@@ -15050,6 +15650,10 @@
             <a:prstDash val="solid"/>
           </a:ln>
         </p:spPr>
+        <p:txBody>
+          <a:bodyPr/>
+          <a:p/>
+        </p:txBody>
       </p:sp>
       <p:sp>
         <p:nvSpPr>
@@ -15075,6 +15679,10 @@
             <a:prstDash val="solid"/>
           </a:ln>
         </p:spPr>
+        <p:txBody>
+          <a:bodyPr/>
+          <a:p/>
+        </p:txBody>
       </p:sp>
       <p:sp>
         <p:nvSpPr>
@@ -15139,6 +15747,10 @@
             <a:prstDash val="solid"/>
           </a:ln>
         </p:spPr>
+        <p:txBody>
+          <a:bodyPr/>
+          <a:p/>
+        </p:txBody>
       </p:sp>
       <p:sp>
         <p:nvSpPr>
@@ -15235,6 +15847,10 @@
             <a:prstDash val="solid"/>
           </a:ln>
         </p:spPr>
+        <p:txBody>
+          <a:bodyPr/>
+          <a:p/>
+        </p:txBody>
       </p:sp>
       <p:sp>
         <p:nvSpPr>
@@ -15260,6 +15876,10 @@
             <a:prstDash val="solid"/>
           </a:ln>
         </p:spPr>
+        <p:txBody>
+          <a:bodyPr/>
+          <a:p/>
+        </p:txBody>
       </p:sp>
       <p:sp>
         <p:nvSpPr>
@@ -15363,6 +15983,10 @@
             <a:prstDash val="solid"/>
           </a:ln>
         </p:spPr>
+        <p:txBody>
+          <a:bodyPr/>
+          <a:p/>
+        </p:txBody>
       </p:sp>
       <p:sp>
         <p:nvSpPr>
@@ -15468,6 +16092,10 @@
             <a:prstDash val="solid"/>
           </a:ln>
         </p:spPr>
+        <p:txBody>
+          <a:bodyPr/>
+          <a:p/>
+        </p:txBody>
       </p:sp>
       <p:sp>
         <p:nvSpPr>
@@ -15577,6 +16205,10 @@
             <a:prstDash val="solid"/>
           </a:ln>
         </p:spPr>
+        <p:txBody>
+          <a:bodyPr/>
+          <a:p/>
+        </p:txBody>
       </p:sp>
       <p:sp>
         <p:nvSpPr>
@@ -15641,6 +16273,10 @@
             <a:prstDash val="solid"/>
           </a:ln>
         </p:spPr>
+        <p:txBody>
+          <a:bodyPr/>
+          <a:p/>
+        </p:txBody>
       </p:sp>
       <p:sp>
         <p:nvSpPr>
@@ -15707,6 +16343,10 @@
             <a:prstDash val="solid"/>
           </a:ln>
         </p:spPr>
+        <p:txBody>
+          <a:bodyPr/>
+          <a:p/>
+        </p:txBody>
       </p:sp>
       <p:sp>
         <p:nvSpPr>
@@ -15776,6 +16416,10 @@
             <a:prstDash val="solid"/>
           </a:ln>
         </p:spPr>
+        <p:txBody>
+          <a:bodyPr/>
+          <a:p/>
+        </p:txBody>
       </p:sp>
       <p:sp>
         <p:nvSpPr>
@@ -15845,6 +16489,10 @@
             <a:prstDash val="solid"/>
           </a:ln>
         </p:spPr>
+        <p:txBody>
+          <a:bodyPr/>
+          <a:p/>
+        </p:txBody>
       </p:sp>
       <p:sp>
         <p:nvSpPr>
@@ -15914,6 +16562,10 @@
             <a:prstDash val="solid"/>
           </a:ln>
         </p:spPr>
+        <p:txBody>
+          <a:bodyPr/>
+          <a:p/>
+        </p:txBody>
       </p:sp>
       <p:sp>
         <p:nvSpPr>
@@ -15981,6 +16633,10 @@
             <a:prstDash val="solid"/>
           </a:ln>
         </p:spPr>
+        <p:txBody>
+          <a:bodyPr/>
+          <a:p/>
+        </p:txBody>
       </p:sp>
       <p:sp>
         <p:nvSpPr>
@@ -16008,6 +16664,10 @@
             <a:prstDash val="solid"/>
           </a:ln>
         </p:spPr>
+        <p:txBody>
+          <a:bodyPr/>
+          <a:p/>
+        </p:txBody>
       </p:sp>
       <p:sp>
         <p:nvSpPr>
@@ -16117,6 +16777,10 @@
             <a:prstDash val="solid"/>
           </a:ln>
         </p:spPr>
+        <p:txBody>
+          <a:bodyPr/>
+          <a:p/>
+        </p:txBody>
       </p:sp>
       <p:sp>
         <p:nvSpPr>
@@ -16181,6 +16845,10 @@
             <a:prstDash val="solid"/>
           </a:ln>
         </p:spPr>
+        <p:txBody>
+          <a:bodyPr/>
+          <a:p/>
+        </p:txBody>
       </p:sp>
       <p:sp>
         <p:nvSpPr>
@@ -16247,6 +16915,10 @@
             <a:prstDash val="solid"/>
           </a:ln>
         </p:spPr>
+        <p:txBody>
+          <a:bodyPr/>
+          <a:p/>
+        </p:txBody>
       </p:sp>
       <p:sp>
         <p:nvSpPr>
@@ -16316,6 +16988,10 @@
             <a:prstDash val="solid"/>
           </a:ln>
         </p:spPr>
+        <p:txBody>
+          <a:bodyPr/>
+          <a:p/>
+        </p:txBody>
       </p:sp>
       <p:sp>
         <p:nvSpPr>
@@ -16385,6 +17061,10 @@
             <a:prstDash val="solid"/>
           </a:ln>
         </p:spPr>
+        <p:txBody>
+          <a:bodyPr/>
+          <a:p/>
+        </p:txBody>
       </p:sp>
       <p:sp>
         <p:nvSpPr>
@@ -16454,6 +17134,10 @@
             <a:prstDash val="solid"/>
           </a:ln>
         </p:spPr>
+        <p:txBody>
+          <a:bodyPr/>
+          <a:p/>
+        </p:txBody>
       </p:sp>
       <p:sp>
         <p:nvSpPr>
@@ -16521,6 +17205,10 @@
             <a:prstDash val="solid"/>
           </a:ln>
         </p:spPr>
+        <p:txBody>
+          <a:bodyPr/>
+          <a:p/>
+        </p:txBody>
       </p:sp>
       <p:sp>
         <p:nvSpPr>
@@ -16548,6 +17236,10 @@
             <a:prstDash val="solid"/>
           </a:ln>
         </p:spPr>
+        <p:txBody>
+          <a:bodyPr/>
+          <a:p/>
+        </p:txBody>
       </p:sp>
       <p:sp>
         <p:nvSpPr>
@@ -16657,6 +17349,10 @@
             <a:prstDash val="solid"/>
           </a:ln>
         </p:spPr>
+        <p:txBody>
+          <a:bodyPr/>
+          <a:p/>
+        </p:txBody>
       </p:sp>
       <p:sp>
         <p:nvSpPr>
@@ -16721,6 +17417,10 @@
             <a:prstDash val="solid"/>
           </a:ln>
         </p:spPr>
+        <p:txBody>
+          <a:bodyPr/>
+          <a:p/>
+        </p:txBody>
       </p:sp>
       <p:sp>
         <p:nvSpPr>
@@ -16787,6 +17487,10 @@
             <a:prstDash val="solid"/>
           </a:ln>
         </p:spPr>
+        <p:txBody>
+          <a:bodyPr/>
+          <a:p/>
+        </p:txBody>
       </p:sp>
       <p:sp>
         <p:nvSpPr>
@@ -16856,6 +17560,10 @@
             <a:prstDash val="solid"/>
           </a:ln>
         </p:spPr>
+        <p:txBody>
+          <a:bodyPr/>
+          <a:p/>
+        </p:txBody>
       </p:sp>
       <p:sp>
         <p:nvSpPr>
@@ -16925,6 +17633,10 @@
             <a:prstDash val="solid"/>
           </a:ln>
         </p:spPr>
+        <p:txBody>
+          <a:bodyPr/>
+          <a:p/>
+        </p:txBody>
       </p:sp>
       <p:sp>
         <p:nvSpPr>
@@ -16994,6 +17706,10 @@
             <a:prstDash val="solid"/>
           </a:ln>
         </p:spPr>
+        <p:txBody>
+          <a:bodyPr/>
+          <a:p/>
+        </p:txBody>
       </p:sp>
       <p:sp>
         <p:nvSpPr>
@@ -17061,6 +17777,10 @@
             <a:prstDash val="solid"/>
           </a:ln>
         </p:spPr>
+        <p:txBody>
+          <a:bodyPr/>
+          <a:p/>
+        </p:txBody>
       </p:sp>
       <p:sp>
         <p:nvSpPr>
@@ -17088,6 +17808,10 @@
             <a:prstDash val="solid"/>
           </a:ln>
         </p:spPr>
+        <p:txBody>
+          <a:bodyPr/>
+          <a:p/>
+        </p:txBody>
       </p:sp>
       <p:sp>
         <p:nvSpPr>
@@ -17197,6 +17921,10 @@
             <a:prstDash val="solid"/>
           </a:ln>
         </p:spPr>
+        <p:txBody>
+          <a:bodyPr/>
+          <a:p/>
+        </p:txBody>
       </p:sp>
       <p:sp>
         <p:nvSpPr>
@@ -17261,6 +17989,10 @@
             <a:prstDash val="solid"/>
           </a:ln>
         </p:spPr>
+        <p:txBody>
+          <a:bodyPr/>
+          <a:p/>
+        </p:txBody>
       </p:sp>
       <p:sp>
         <p:nvSpPr>
@@ -17327,6 +18059,10 @@
             <a:prstDash val="solid"/>
           </a:ln>
         </p:spPr>
+        <p:txBody>
+          <a:bodyPr/>
+          <a:p/>
+        </p:txBody>
       </p:sp>
       <p:sp>
         <p:nvSpPr>
@@ -17396,6 +18132,10 @@
             <a:prstDash val="solid"/>
           </a:ln>
         </p:spPr>
+        <p:txBody>
+          <a:bodyPr/>
+          <a:p/>
+        </p:txBody>
       </p:sp>
       <p:sp>
         <p:nvSpPr>
@@ -17465,6 +18205,10 @@
             <a:prstDash val="solid"/>
           </a:ln>
         </p:spPr>
+        <p:txBody>
+          <a:bodyPr/>
+          <a:p/>
+        </p:txBody>
       </p:sp>
       <p:sp>
         <p:nvSpPr>
@@ -17534,6 +18278,10 @@
             <a:prstDash val="solid"/>
           </a:ln>
         </p:spPr>
+        <p:txBody>
+          <a:bodyPr/>
+          <a:p/>
+        </p:txBody>
       </p:sp>
       <p:sp>
         <p:nvSpPr>
@@ -17603,6 +18351,10 @@
             <a:prstDash val="solid"/>
           </a:ln>
         </p:spPr>
+        <p:txBody>
+          <a:bodyPr/>
+          <a:p/>
+        </p:txBody>
       </p:sp>
       <p:sp>
         <p:nvSpPr>
